--- a/Linux2.pptx
+++ b/Linux2.pptx
@@ -6,6 +6,8 @@
   </p:sldMasterIdLst>
   <p:sldIdLst>
     <p:sldId id="256" r:id="rId2"/>
+    <p:sldId id="257" r:id="rId3"/>
+    <p:sldId id="258" r:id="rId4"/>
   </p:sldIdLst>
   <p:sldSz cx="12192000" cy="6858000"/>
   <p:notesSz cx="6858000" cy="9144000"/>
@@ -104,6 +106,11 @@
       </a:defRPr>
     </a:lvl9pPr>
   </p:defaultTextStyle>
+  <p:extLst>
+    <p:ext uri="{EFAFB233-063F-42B5-8137-9DF3F51BA10A}">
+      <p15:sldGuideLst xmlns:p15="http://schemas.microsoft.com/office/powerpoint/2012/main"/>
+    </p:ext>
+  </p:extLst>
 </p:presentation>
 </file>
 
@@ -254,7 +261,7 @@
           <a:p>
             <a:fld id="{1B986F1A-7ACE-463F-A018-E8194F4B654B}" type="datetimeFigureOut">
               <a:rPr lang="en-US" smtClean="0"/>
-              <a:t>10/18/2026</a:t>
+              <a:t>10/19/2026</a:t>
             </a:fld>
             <a:endParaRPr lang="en-US"/>
           </a:p>
@@ -452,7 +459,7 @@
           <a:p>
             <a:fld id="{1B986F1A-7ACE-463F-A018-E8194F4B654B}" type="datetimeFigureOut">
               <a:rPr lang="en-US" smtClean="0"/>
-              <a:t>10/18/2026</a:t>
+              <a:t>10/19/2026</a:t>
             </a:fld>
             <a:endParaRPr lang="en-US"/>
           </a:p>
@@ -660,7 +667,7 @@
           <a:p>
             <a:fld id="{1B986F1A-7ACE-463F-A018-E8194F4B654B}" type="datetimeFigureOut">
               <a:rPr lang="en-US" smtClean="0"/>
-              <a:t>10/18/2026</a:t>
+              <a:t>10/19/2026</a:t>
             </a:fld>
             <a:endParaRPr lang="en-US"/>
           </a:p>
@@ -858,7 +865,7 @@
           <a:p>
             <a:fld id="{1B986F1A-7ACE-463F-A018-E8194F4B654B}" type="datetimeFigureOut">
               <a:rPr lang="en-US" smtClean="0"/>
-              <a:t>10/18/2026</a:t>
+              <a:t>10/19/2026</a:t>
             </a:fld>
             <a:endParaRPr lang="en-US"/>
           </a:p>
@@ -1133,7 +1140,7 @@
           <a:p>
             <a:fld id="{1B986F1A-7ACE-463F-A018-E8194F4B654B}" type="datetimeFigureOut">
               <a:rPr lang="en-US" smtClean="0"/>
-              <a:t>10/18/2026</a:t>
+              <a:t>10/19/2026</a:t>
             </a:fld>
             <a:endParaRPr lang="en-US"/>
           </a:p>
@@ -1398,7 +1405,7 @@
           <a:p>
             <a:fld id="{1B986F1A-7ACE-463F-A018-E8194F4B654B}" type="datetimeFigureOut">
               <a:rPr lang="en-US" smtClean="0"/>
-              <a:t>10/18/2026</a:t>
+              <a:t>10/19/2026</a:t>
             </a:fld>
             <a:endParaRPr lang="en-US"/>
           </a:p>
@@ -1810,7 +1817,7 @@
           <a:p>
             <a:fld id="{1B986F1A-7ACE-463F-A018-E8194F4B654B}" type="datetimeFigureOut">
               <a:rPr lang="en-US" smtClean="0"/>
-              <a:t>10/18/2026</a:t>
+              <a:t>10/19/2026</a:t>
             </a:fld>
             <a:endParaRPr lang="en-US"/>
           </a:p>
@@ -1951,7 +1958,7 @@
           <a:p>
             <a:fld id="{1B986F1A-7ACE-463F-A018-E8194F4B654B}" type="datetimeFigureOut">
               <a:rPr lang="en-US" smtClean="0"/>
-              <a:t>10/18/2026</a:t>
+              <a:t>10/19/2026</a:t>
             </a:fld>
             <a:endParaRPr lang="en-US"/>
           </a:p>
@@ -2064,7 +2071,7 @@
           <a:p>
             <a:fld id="{1B986F1A-7ACE-463F-A018-E8194F4B654B}" type="datetimeFigureOut">
               <a:rPr lang="en-US" smtClean="0"/>
-              <a:t>10/18/2026</a:t>
+              <a:t>10/19/2026</a:t>
             </a:fld>
             <a:endParaRPr lang="en-US"/>
           </a:p>
@@ -2375,7 +2382,7 @@
           <a:p>
             <a:fld id="{1B986F1A-7ACE-463F-A018-E8194F4B654B}" type="datetimeFigureOut">
               <a:rPr lang="en-US" smtClean="0"/>
-              <a:t>10/18/2026</a:t>
+              <a:t>10/19/2026</a:t>
             </a:fld>
             <a:endParaRPr lang="en-US"/>
           </a:p>
@@ -2663,7 +2670,7 @@
           <a:p>
             <a:fld id="{1B986F1A-7ACE-463F-A018-E8194F4B654B}" type="datetimeFigureOut">
               <a:rPr lang="en-US" smtClean="0"/>
-              <a:t>10/18/2026</a:t>
+              <a:t>10/19/2026</a:t>
             </a:fld>
             <a:endParaRPr lang="en-US"/>
           </a:p>
@@ -2904,7 +2911,7 @@
           <a:p>
             <a:fld id="{1B986F1A-7ACE-463F-A018-E8194F4B654B}" type="datetimeFigureOut">
               <a:rPr lang="en-US" smtClean="0"/>
-              <a:t>10/18/2026</a:t>
+              <a:t>10/19/2026</a:t>
             </a:fld>
             <a:endParaRPr lang="en-US"/>
           </a:p>
@@ -3375,6 +3382,483 @@
 </p:sld>
 </file>
 
+<file path=ppt/slides/slide2.xml><?xml version="1.0" encoding="utf-8"?>
+<p:sld xmlns:a="http://schemas.openxmlformats.org/drawingml/2006/main" xmlns:r="http://schemas.openxmlformats.org/officeDocument/2006/relationships" xmlns:p="http://schemas.openxmlformats.org/presentationml/2006/main">
+  <p:cSld>
+    <p:spTree>
+      <p:nvGrpSpPr>
+        <p:cNvPr id="1" name=""/>
+        <p:cNvGrpSpPr/>
+        <p:nvPr/>
+      </p:nvGrpSpPr>
+      <p:grpSpPr>
+        <a:xfrm>
+          <a:off x="0" y="0"/>
+          <a:ext cx="0" cy="0"/>
+          <a:chOff x="0" y="0"/>
+          <a:chExt cx="0" cy="0"/>
+        </a:xfrm>
+      </p:grpSpPr>
+      <p:sp>
+        <p:nvSpPr>
+          <p:cNvPr id="3" name="Rectangle 2">
+            <a:extLst>
+              <a:ext uri="{FF2B5EF4-FFF2-40B4-BE49-F238E27FC236}">
+                <a16:creationId xmlns:a16="http://schemas.microsoft.com/office/drawing/2014/main" id="{C7513692-18F1-49A3-8123-3E9FF9D38092}"/>
+              </a:ext>
+            </a:extLst>
+          </p:cNvPr>
+          <p:cNvSpPr/>
+          <p:nvPr/>
+        </p:nvSpPr>
+        <p:spPr>
+          <a:xfrm>
+            <a:off x="192393" y="218624"/>
+            <a:ext cx="10202183" cy="646331"/>
+          </a:xfrm>
+          <a:prstGeom prst="rect">
+            <a:avLst/>
+          </a:prstGeom>
+        </p:spPr>
+        <p:txBody>
+          <a:bodyPr wrap="square">
+            <a:spAutoFit/>
+          </a:bodyPr>
+          <a:lstStyle/>
+          <a:p>
+            <a:r>
+              <a:rPr lang="en-US" dirty="0">
+                <a:latin typeface="Medium Sans"/>
+              </a:rPr>
+              <a:t> * Create the directory /home/ec2-user/</a:t>
+            </a:r>
+            <a:r>
+              <a:rPr lang="en-US" dirty="0" err="1">
+                <a:latin typeface="Medium Sans"/>
+              </a:rPr>
+              <a:t>webapp</a:t>
+            </a:r>
+            <a:r>
+              <a:rPr lang="en-US" dirty="0">
+                <a:latin typeface="Medium Sans"/>
+              </a:rPr>
+              <a:t>/ with three subdirectories inside it: scripts/, logs/, and config/ using a single </a:t>
+            </a:r>
+            <a:r>
+              <a:rPr lang="en-US" dirty="0" err="1">
+                <a:latin typeface="Medium Sans"/>
+              </a:rPr>
+              <a:t>mkdir</a:t>
+            </a:r>
+            <a:r>
+              <a:rPr lang="en-US" dirty="0">
+                <a:latin typeface="Medium Sans"/>
+              </a:rPr>
+              <a:t> -p command.</a:t>
+            </a:r>
+            <a:endParaRPr lang="en-US" dirty="0"/>
+          </a:p>
+        </p:txBody>
+      </p:sp>
+      <p:pic>
+        <p:nvPicPr>
+          <p:cNvPr id="4" name="Picture 3">
+            <a:extLst>
+              <a:ext uri="{FF2B5EF4-FFF2-40B4-BE49-F238E27FC236}">
+                <a16:creationId xmlns:a16="http://schemas.microsoft.com/office/drawing/2014/main" id="{50FD39C9-C13F-40F5-9296-EC16CF6C07F5}"/>
+              </a:ext>
+            </a:extLst>
+          </p:cNvPr>
+          <p:cNvPicPr>
+            <a:picLocks noChangeAspect="1"/>
+          </p:cNvPicPr>
+          <p:nvPr/>
+        </p:nvPicPr>
+        <p:blipFill>
+          <a:blip r:embed="rId2"/>
+          <a:stretch>
+            <a:fillRect/>
+          </a:stretch>
+        </p:blipFill>
+        <p:spPr>
+          <a:xfrm>
+            <a:off x="192393" y="864955"/>
+            <a:ext cx="7211431" cy="1400370"/>
+          </a:xfrm>
+          <a:prstGeom prst="rect">
+            <a:avLst/>
+          </a:prstGeom>
+        </p:spPr>
+      </p:pic>
+      <p:pic>
+        <p:nvPicPr>
+          <p:cNvPr id="5" name="Picture 4">
+            <a:extLst>
+              <a:ext uri="{FF2B5EF4-FFF2-40B4-BE49-F238E27FC236}">
+                <a16:creationId xmlns:a16="http://schemas.microsoft.com/office/drawing/2014/main" id="{6FC2260D-23DC-44F0-BD37-002CB16B7AA7}"/>
+              </a:ext>
+            </a:extLst>
+          </p:cNvPr>
+          <p:cNvPicPr>
+            <a:picLocks noChangeAspect="1"/>
+          </p:cNvPicPr>
+          <p:nvPr/>
+        </p:nvPicPr>
+        <p:blipFill>
+          <a:blip r:embed="rId3"/>
+          <a:stretch>
+            <a:fillRect/>
+          </a:stretch>
+        </p:blipFill>
+        <p:spPr>
+          <a:xfrm>
+            <a:off x="220972" y="2783106"/>
+            <a:ext cx="7182852" cy="2476846"/>
+          </a:xfrm>
+          <a:prstGeom prst="rect">
+            <a:avLst/>
+          </a:prstGeom>
+        </p:spPr>
+      </p:pic>
+      <p:sp>
+        <p:nvSpPr>
+          <p:cNvPr id="6" name="Rectangle 5">
+            <a:extLst>
+              <a:ext uri="{FF2B5EF4-FFF2-40B4-BE49-F238E27FC236}">
+                <a16:creationId xmlns:a16="http://schemas.microsoft.com/office/drawing/2014/main" id="{004A825E-DDF3-4D79-A98B-954B3B3692C8}"/>
+              </a:ext>
+            </a:extLst>
+          </p:cNvPr>
+          <p:cNvSpPr/>
+          <p:nvPr/>
+        </p:nvSpPr>
+        <p:spPr>
+          <a:xfrm>
+            <a:off x="206683" y="2190141"/>
+            <a:ext cx="7538824" cy="646331"/>
+          </a:xfrm>
+          <a:prstGeom prst="rect">
+            <a:avLst/>
+          </a:prstGeom>
+        </p:spPr>
+        <p:txBody>
+          <a:bodyPr wrap="square">
+            <a:spAutoFit/>
+          </a:bodyPr>
+          <a:lstStyle/>
+          <a:p>
+            <a:r>
+              <a:rPr lang="en-US" dirty="0">
+                <a:latin typeface="Medium Sans"/>
+              </a:rPr>
+              <a:t>● Use cat &gt; to create config/</a:t>
+            </a:r>
+            <a:r>
+              <a:rPr lang="en-US" dirty="0" err="1">
+                <a:latin typeface="Medium Sans"/>
+              </a:rPr>
+              <a:t>app.conf</a:t>
+            </a:r>
+            <a:r>
+              <a:rPr lang="en-US" dirty="0">
+                <a:latin typeface="Medium Sans"/>
+              </a:rPr>
+              <a:t> with two lines of content: APP_NAME=WebApp and PORT=8080. Save using </a:t>
+            </a:r>
+            <a:r>
+              <a:rPr lang="en-US" dirty="0" err="1">
+                <a:latin typeface="Medium Sans"/>
+              </a:rPr>
+              <a:t>Ctrl+D</a:t>
+            </a:r>
+            <a:r>
+              <a:rPr lang="en-US" dirty="0">
+                <a:latin typeface="Medium Sans"/>
+              </a:rPr>
+              <a:t>.</a:t>
+            </a:r>
+            <a:endParaRPr lang="en-US" dirty="0"/>
+          </a:p>
+        </p:txBody>
+      </p:sp>
+    </p:spTree>
+    <p:extLst>
+      <p:ext uri="{BB962C8B-B14F-4D97-AF65-F5344CB8AC3E}">
+        <p14:creationId xmlns:p14="http://schemas.microsoft.com/office/powerpoint/2010/main" val="1300908343"/>
+      </p:ext>
+    </p:extLst>
+  </p:cSld>
+  <p:clrMapOvr>
+    <a:masterClrMapping/>
+  </p:clrMapOvr>
+</p:sld>
+</file>
+
+<file path=ppt/slides/slide3.xml><?xml version="1.0" encoding="utf-8"?>
+<p:sld xmlns:a="http://schemas.openxmlformats.org/drawingml/2006/main" xmlns:r="http://schemas.openxmlformats.org/officeDocument/2006/relationships" xmlns:p="http://schemas.openxmlformats.org/presentationml/2006/main">
+  <p:cSld>
+    <p:spTree>
+      <p:nvGrpSpPr>
+        <p:cNvPr id="1" name=""/>
+        <p:cNvGrpSpPr/>
+        <p:nvPr/>
+      </p:nvGrpSpPr>
+      <p:grpSpPr>
+        <a:xfrm>
+          <a:off x="0" y="0"/>
+          <a:ext cx="0" cy="0"/>
+          <a:chOff x="0" y="0"/>
+          <a:chExt cx="0" cy="0"/>
+        </a:xfrm>
+      </p:grpSpPr>
+      <p:pic>
+        <p:nvPicPr>
+          <p:cNvPr id="3" name="Picture 2">
+            <a:extLst>
+              <a:ext uri="{FF2B5EF4-FFF2-40B4-BE49-F238E27FC236}">
+                <a16:creationId xmlns:a16="http://schemas.microsoft.com/office/drawing/2014/main" id="{41BCE1BF-2F73-4E2D-9443-FA1488630A3B}"/>
+              </a:ext>
+            </a:extLst>
+          </p:cNvPr>
+          <p:cNvPicPr>
+            <a:picLocks noChangeAspect="1"/>
+          </p:cNvPicPr>
+          <p:nvPr/>
+        </p:nvPicPr>
+        <p:blipFill>
+          <a:blip r:embed="rId2"/>
+          <a:stretch>
+            <a:fillRect/>
+          </a:stretch>
+        </p:blipFill>
+        <p:spPr>
+          <a:xfrm>
+            <a:off x="492967" y="529946"/>
+            <a:ext cx="5325218" cy="1895740"/>
+          </a:xfrm>
+          <a:prstGeom prst="rect">
+            <a:avLst/>
+          </a:prstGeom>
+        </p:spPr>
+      </p:pic>
+      <p:sp>
+        <p:nvSpPr>
+          <p:cNvPr id="4" name="Rectangle 3">
+            <a:extLst>
+              <a:ext uri="{FF2B5EF4-FFF2-40B4-BE49-F238E27FC236}">
+                <a16:creationId xmlns:a16="http://schemas.microsoft.com/office/drawing/2014/main" id="{63872173-47CA-440E-B8F0-037F3E73EA1E}"/>
+              </a:ext>
+            </a:extLst>
+          </p:cNvPr>
+          <p:cNvSpPr/>
+          <p:nvPr/>
+        </p:nvSpPr>
+        <p:spPr>
+          <a:xfrm>
+            <a:off x="99948" y="160614"/>
+            <a:ext cx="12474736" cy="369332"/>
+          </a:xfrm>
+          <a:prstGeom prst="rect">
+            <a:avLst/>
+          </a:prstGeom>
+        </p:spPr>
+        <p:txBody>
+          <a:bodyPr wrap="square">
+            <a:spAutoFit/>
+          </a:bodyPr>
+          <a:lstStyle/>
+          <a:p>
+            <a:r>
+              <a:rPr lang="en-US" dirty="0">
+                <a:latin typeface="Medium Sans"/>
+              </a:rPr>
+              <a:t>● Use touch to create an empty file at logs/app.log. Confirm it is 0 bytes using ls -l.</a:t>
+            </a:r>
+            <a:endParaRPr lang="en-US" dirty="0"/>
+          </a:p>
+        </p:txBody>
+      </p:sp>
+      <p:sp>
+        <p:nvSpPr>
+          <p:cNvPr id="5" name="Rectangle 4">
+            <a:extLst>
+              <a:ext uri="{FF2B5EF4-FFF2-40B4-BE49-F238E27FC236}">
+                <a16:creationId xmlns:a16="http://schemas.microsoft.com/office/drawing/2014/main" id="{486E2E82-D30D-4139-8059-3D9A8FA1F0E0}"/>
+              </a:ext>
+            </a:extLst>
+          </p:cNvPr>
+          <p:cNvSpPr/>
+          <p:nvPr/>
+        </p:nvSpPr>
+        <p:spPr>
+          <a:xfrm>
+            <a:off x="107576" y="2505670"/>
+            <a:ext cx="10529048" cy="2308324"/>
+          </a:xfrm>
+          <a:prstGeom prst="rect">
+            <a:avLst/>
+          </a:prstGeom>
+        </p:spPr>
+        <p:txBody>
+          <a:bodyPr wrap="square">
+            <a:spAutoFit/>
+          </a:bodyPr>
+          <a:lstStyle/>
+          <a:p>
+            <a:r>
+              <a:rPr lang="en-US" dirty="0">
+                <a:latin typeface="Medium Sans"/>
+              </a:rPr>
+              <a:t>● Set permissions: </a:t>
+            </a:r>
+            <a:r>
+              <a:rPr lang="en-US" dirty="0" err="1">
+                <a:latin typeface="Medium Sans"/>
+              </a:rPr>
+              <a:t>chmod</a:t>
+            </a:r>
+            <a:r>
+              <a:rPr lang="en-US" dirty="0">
+                <a:latin typeface="Medium Sans"/>
+              </a:rPr>
+              <a:t> 755 scripts/ and </a:t>
+            </a:r>
+            <a:r>
+              <a:rPr lang="en-US" dirty="0" err="1">
+                <a:latin typeface="Medium Sans"/>
+              </a:rPr>
+              <a:t>chmod</a:t>
+            </a:r>
+            <a:r>
+              <a:rPr lang="en-US" dirty="0">
+                <a:latin typeface="Medium Sans"/>
+              </a:rPr>
+              <a:t> 644 config/</a:t>
+            </a:r>
+            <a:r>
+              <a:rPr lang="en-US" dirty="0" err="1">
+                <a:latin typeface="Medium Sans"/>
+              </a:rPr>
+              <a:t>app.conf</a:t>
+            </a:r>
+            <a:r>
+              <a:rPr lang="en-US" dirty="0">
+                <a:latin typeface="Medium Sans"/>
+              </a:rPr>
+              <a:t>. Explain in your own words what 755 and 644 mean for owner, group, and others. </a:t>
+            </a:r>
+          </a:p>
+          <a:p>
+            <a:r>
+              <a:rPr lang="en-US" dirty="0">
+                <a:solidFill>
+                  <a:srgbClr val="FF0000"/>
+                </a:solidFill>
+                <a:latin typeface="Medium Sans"/>
+              </a:rPr>
+              <a:t>755</a:t>
+            </a:r>
+          </a:p>
+          <a:p>
+            <a:r>
+              <a:rPr lang="en-US" dirty="0">
+                <a:solidFill>
+                  <a:srgbClr val="FF0000"/>
+                </a:solidFill>
+                <a:latin typeface="Medium Sans"/>
+              </a:rPr>
+              <a:t>7 – read(4) write(2) execution(1) permission</a:t>
+            </a:r>
+          </a:p>
+          <a:p>
+            <a:r>
+              <a:rPr lang="en-US" dirty="0">
+                <a:solidFill>
+                  <a:srgbClr val="FF0000"/>
+                </a:solidFill>
+                <a:latin typeface="Medium Sans"/>
+              </a:rPr>
+              <a:t>5- read(4) execution(1) permission</a:t>
+            </a:r>
+          </a:p>
+          <a:p>
+            <a:r>
+              <a:rPr lang="en-US" dirty="0">
+                <a:solidFill>
+                  <a:srgbClr val="FF0000"/>
+                </a:solidFill>
+                <a:latin typeface="Medium Sans"/>
+              </a:rPr>
+              <a:t>644</a:t>
+            </a:r>
+          </a:p>
+          <a:p>
+            <a:r>
+              <a:rPr lang="en-US" dirty="0">
+                <a:solidFill>
+                  <a:srgbClr val="FF0000"/>
+                </a:solidFill>
+                <a:latin typeface="Medium Sans"/>
+              </a:rPr>
+              <a:t>6 – read(4) write(2) permission</a:t>
+            </a:r>
+          </a:p>
+          <a:p>
+            <a:r>
+              <a:rPr lang="en-US" dirty="0">
+                <a:solidFill>
+                  <a:srgbClr val="FF0000"/>
+                </a:solidFill>
+                <a:latin typeface="Medium Sans"/>
+              </a:rPr>
+              <a:t>4 – read (4) permission</a:t>
+            </a:r>
+          </a:p>
+        </p:txBody>
+      </p:sp>
+      <p:pic>
+        <p:nvPicPr>
+          <p:cNvPr id="6" name="Picture 5">
+            <a:extLst>
+              <a:ext uri="{FF2B5EF4-FFF2-40B4-BE49-F238E27FC236}">
+                <a16:creationId xmlns:a16="http://schemas.microsoft.com/office/drawing/2014/main" id="{544F28E8-0068-4E0B-9392-192CF22563C5}"/>
+              </a:ext>
+            </a:extLst>
+          </p:cNvPr>
+          <p:cNvPicPr>
+            <a:picLocks noChangeAspect="1"/>
+          </p:cNvPicPr>
+          <p:nvPr/>
+        </p:nvPicPr>
+        <p:blipFill>
+          <a:blip r:embed="rId3"/>
+          <a:stretch>
+            <a:fillRect/>
+          </a:stretch>
+        </p:blipFill>
+        <p:spPr>
+          <a:xfrm>
+            <a:off x="107576" y="4813994"/>
+            <a:ext cx="7783011" cy="981212"/>
+          </a:xfrm>
+          <a:prstGeom prst="rect">
+            <a:avLst/>
+          </a:prstGeom>
+        </p:spPr>
+      </p:pic>
+    </p:spTree>
+    <p:extLst>
+      <p:ext uri="{BB962C8B-B14F-4D97-AF65-F5344CB8AC3E}">
+        <p14:creationId xmlns:p14="http://schemas.microsoft.com/office/powerpoint/2010/main" val="750454233"/>
+      </p:ext>
+    </p:extLst>
+  </p:cSld>
+  <p:clrMapOvr>
+    <a:masterClrMapping/>
+  </p:clrMapOvr>
+</p:sld>
+</file>
+
 <file path=ppt/theme/theme1.xml><?xml version="1.0" encoding="utf-8"?>
 <a:theme xmlns:a="http://schemas.openxmlformats.org/drawingml/2006/main" name="Office Theme">
   <a:themeElements>

--- a/Linux2.pptx
+++ b/Linux2.pptx
@@ -8,6 +8,11 @@
     <p:sldId id="256" r:id="rId2"/>
     <p:sldId id="257" r:id="rId3"/>
     <p:sldId id="258" r:id="rId4"/>
+    <p:sldId id="259" r:id="rId5"/>
+    <p:sldId id="260" r:id="rId6"/>
+    <p:sldId id="261" r:id="rId7"/>
+    <p:sldId id="262" r:id="rId8"/>
+    <p:sldId id="263" r:id="rId9"/>
   </p:sldIdLst>
   <p:sldSz cx="12192000" cy="6858000"/>
   <p:notesSz cx="6858000" cy="9144000"/>
@@ -3859,6 +3864,1258 @@
 </p:sld>
 </file>
 
+<file path=ppt/slides/slide4.xml><?xml version="1.0" encoding="utf-8"?>
+<p:sld xmlns:a="http://schemas.openxmlformats.org/drawingml/2006/main" xmlns:r="http://schemas.openxmlformats.org/officeDocument/2006/relationships" xmlns:p="http://schemas.openxmlformats.org/presentationml/2006/main">
+  <p:cSld>
+    <p:spTree>
+      <p:nvGrpSpPr>
+        <p:cNvPr id="1" name=""/>
+        <p:cNvGrpSpPr/>
+        <p:nvPr/>
+      </p:nvGrpSpPr>
+      <p:grpSpPr>
+        <a:xfrm>
+          <a:off x="0" y="0"/>
+          <a:ext cx="0" cy="0"/>
+          <a:chOff x="0" y="0"/>
+          <a:chExt cx="0" cy="0"/>
+        </a:xfrm>
+      </p:grpSpPr>
+      <p:sp>
+        <p:nvSpPr>
+          <p:cNvPr id="2" name="Rectangle 1">
+            <a:extLst>
+              <a:ext uri="{FF2B5EF4-FFF2-40B4-BE49-F238E27FC236}">
+                <a16:creationId xmlns:a16="http://schemas.microsoft.com/office/drawing/2014/main" id="{81909403-449A-41ED-84F8-14900B230206}"/>
+              </a:ext>
+            </a:extLst>
+          </p:cNvPr>
+          <p:cNvSpPr/>
+          <p:nvPr/>
+        </p:nvSpPr>
+        <p:spPr>
+          <a:xfrm>
+            <a:off x="349624" y="289679"/>
+            <a:ext cx="6096000" cy="3139321"/>
+          </a:xfrm>
+          <a:prstGeom prst="rect">
+            <a:avLst/>
+          </a:prstGeom>
+        </p:spPr>
+        <p:txBody>
+          <a:bodyPr>
+            <a:spAutoFit/>
+          </a:bodyPr>
+          <a:lstStyle/>
+          <a:p>
+            <a:r>
+              <a:rPr lang="en-US" dirty="0">
+                <a:latin typeface="Medium Sans"/>
+              </a:rPr>
+              <a:t>● Recursively change ownership of the entire </a:t>
+            </a:r>
+            <a:r>
+              <a:rPr lang="en-US" dirty="0" err="1">
+                <a:latin typeface="Medium Sans"/>
+              </a:rPr>
+              <a:t>webapp</a:t>
+            </a:r>
+            <a:r>
+              <a:rPr lang="en-US" dirty="0">
+                <a:latin typeface="Medium Sans"/>
+              </a:rPr>
+              <a:t>/ directory to </a:t>
+            </a:r>
+            <a:r>
+              <a:rPr lang="en-US" dirty="0" err="1">
+                <a:latin typeface="Medium Sans"/>
+              </a:rPr>
+              <a:t>root:root</a:t>
+            </a:r>
+            <a:r>
+              <a:rPr lang="en-US" dirty="0">
+                <a:latin typeface="Medium Sans"/>
+              </a:rPr>
+              <a:t> using </a:t>
+            </a:r>
+            <a:r>
+              <a:rPr lang="en-US" dirty="0" err="1">
+                <a:latin typeface="Medium Sans"/>
+              </a:rPr>
+              <a:t>chown</a:t>
+            </a:r>
+            <a:r>
+              <a:rPr lang="en-US" dirty="0">
+                <a:latin typeface="Medium Sans"/>
+              </a:rPr>
+              <a:t> -R. Then run ls -</a:t>
+            </a:r>
+            <a:r>
+              <a:rPr lang="en-US" dirty="0" err="1">
+                <a:latin typeface="Medium Sans"/>
+              </a:rPr>
+              <a:t>lR</a:t>
+            </a:r>
+            <a:r>
+              <a:rPr lang="en-US" dirty="0">
+                <a:latin typeface="Medium Sans"/>
+              </a:rPr>
+              <a:t> /home/ec2-user/</a:t>
+            </a:r>
+            <a:r>
+              <a:rPr lang="en-US" dirty="0" err="1">
+                <a:latin typeface="Medium Sans"/>
+              </a:rPr>
+              <a:t>webapp</a:t>
+            </a:r>
+            <a:r>
+              <a:rPr lang="en-US" dirty="0">
+                <a:latin typeface="Medium Sans"/>
+              </a:rPr>
+              <a:t>/ and share the output to confirm every file and folder shows root </a:t>
+            </a:r>
+            <a:r>
+              <a:rPr lang="en-US" dirty="0" err="1">
+                <a:latin typeface="Medium Sans"/>
+              </a:rPr>
+              <a:t>root</a:t>
+            </a:r>
+            <a:r>
+              <a:rPr lang="en-US" dirty="0">
+                <a:latin typeface="Medium Sans"/>
+              </a:rPr>
+              <a:t> as owner.</a:t>
+            </a:r>
+          </a:p>
+          <a:p>
+            <a:r>
+              <a:rPr lang="en-US" dirty="0">
+                <a:latin typeface="Medium Sans"/>
+              </a:rPr>
+              <a:t>Expected final structure:</a:t>
+            </a:r>
+          </a:p>
+          <a:p>
+            <a:r>
+              <a:rPr lang="en-US" dirty="0" err="1">
+                <a:latin typeface="Medium Sans"/>
+              </a:rPr>
+              <a:t>webapp</a:t>
+            </a:r>
+            <a:r>
+              <a:rPr lang="en-US" dirty="0">
+                <a:latin typeface="Medium Sans"/>
+              </a:rPr>
+              <a:t>/</a:t>
+            </a:r>
+          </a:p>
+          <a:p>
+            <a:r>
+              <a:rPr lang="en-US" dirty="0">
+                <a:latin typeface="Medium Sans"/>
+              </a:rPr>
+              <a:t>├── scripts/          (</a:t>
+            </a:r>
+            <a:r>
+              <a:rPr lang="en-US" dirty="0" err="1">
+                <a:latin typeface="Medium Sans"/>
+              </a:rPr>
+              <a:t>drwxr</a:t>
+            </a:r>
+            <a:r>
+              <a:rPr lang="en-US" dirty="0">
+                <a:latin typeface="Medium Sans"/>
+              </a:rPr>
+              <a:t>-</a:t>
+            </a:r>
+            <a:r>
+              <a:rPr lang="en-US" dirty="0" err="1">
+                <a:latin typeface="Medium Sans"/>
+              </a:rPr>
+              <a:t>xr</a:t>
+            </a:r>
+            <a:r>
+              <a:rPr lang="en-US" dirty="0">
+                <a:latin typeface="Medium Sans"/>
+              </a:rPr>
+              <a:t>-x  root root)</a:t>
+            </a:r>
+          </a:p>
+          <a:p>
+            <a:r>
+              <a:rPr lang="en-US" dirty="0">
+                <a:latin typeface="Medium Sans"/>
+              </a:rPr>
+              <a:t>├── logs/             (</a:t>
+            </a:r>
+            <a:r>
+              <a:rPr lang="en-US" dirty="0" err="1">
+                <a:latin typeface="Medium Sans"/>
+              </a:rPr>
+              <a:t>drwxr</a:t>
+            </a:r>
+            <a:r>
+              <a:rPr lang="en-US" dirty="0">
+                <a:latin typeface="Medium Sans"/>
+              </a:rPr>
+              <a:t>-</a:t>
+            </a:r>
+            <a:r>
+              <a:rPr lang="en-US" dirty="0" err="1">
+                <a:latin typeface="Medium Sans"/>
+              </a:rPr>
+              <a:t>xr</a:t>
+            </a:r>
+            <a:r>
+              <a:rPr lang="en-US" dirty="0">
+                <a:latin typeface="Medium Sans"/>
+              </a:rPr>
+              <a:t>-x  root root)</a:t>
+            </a:r>
+          </a:p>
+          <a:p>
+            <a:r>
+              <a:rPr lang="en-US" dirty="0">
+                <a:latin typeface="Medium Sans"/>
+              </a:rPr>
+              <a:t>└── config/           (</a:t>
+            </a:r>
+            <a:r>
+              <a:rPr lang="en-US" dirty="0" err="1">
+                <a:latin typeface="Medium Sans"/>
+              </a:rPr>
+              <a:t>drwxr</a:t>
+            </a:r>
+            <a:r>
+              <a:rPr lang="en-US" dirty="0">
+                <a:latin typeface="Medium Sans"/>
+              </a:rPr>
+              <a:t>-</a:t>
+            </a:r>
+            <a:r>
+              <a:rPr lang="en-US" dirty="0" err="1">
+                <a:latin typeface="Medium Sans"/>
+              </a:rPr>
+              <a:t>xr</a:t>
+            </a:r>
+            <a:r>
+              <a:rPr lang="en-US" dirty="0">
+                <a:latin typeface="Medium Sans"/>
+              </a:rPr>
+              <a:t>-x  root root)</a:t>
+            </a:r>
+          </a:p>
+          <a:p>
+            <a:r>
+              <a:rPr lang="en-US" dirty="0">
+                <a:latin typeface="Medium Sans"/>
+              </a:rPr>
+              <a:t>    ├── </a:t>
+            </a:r>
+            <a:r>
+              <a:rPr lang="en-US" dirty="0" err="1">
+                <a:latin typeface="Medium Sans"/>
+              </a:rPr>
+              <a:t>app.conf</a:t>
+            </a:r>
+            <a:r>
+              <a:rPr lang="en-US" dirty="0">
+                <a:latin typeface="Medium Sans"/>
+              </a:rPr>
+              <a:t>          (-</a:t>
+            </a:r>
+            <a:r>
+              <a:rPr lang="en-US" dirty="0" err="1">
+                <a:latin typeface="Medium Sans"/>
+              </a:rPr>
+              <a:t>rw</a:t>
+            </a:r>
+            <a:r>
+              <a:rPr lang="en-US" dirty="0">
+                <a:latin typeface="Medium Sans"/>
+              </a:rPr>
+              <a:t>-r--r--  root root)</a:t>
+            </a:r>
+          </a:p>
+          <a:p>
+            <a:r>
+              <a:rPr lang="en-US" dirty="0">
+                <a:latin typeface="Medium Sans"/>
+              </a:rPr>
+              <a:t>    └── app.log           (-</a:t>
+            </a:r>
+            <a:r>
+              <a:rPr lang="en-US" dirty="0" err="1">
+                <a:latin typeface="Medium Sans"/>
+              </a:rPr>
+              <a:t>rw</a:t>
+            </a:r>
+            <a:r>
+              <a:rPr lang="en-US" dirty="0">
+                <a:latin typeface="Medium Sans"/>
+              </a:rPr>
+              <a:t>-r--r--  root </a:t>
+            </a:r>
+            <a:r>
+              <a:rPr lang="en-US" dirty="0" err="1">
+                <a:latin typeface="Medium Sans"/>
+              </a:rPr>
+              <a:t>roo</a:t>
+            </a:r>
+            <a:endParaRPr lang="en-US" b="0" i="0" dirty="0">
+              <a:effectLst/>
+              <a:latin typeface="Medium Sans"/>
+            </a:endParaRPr>
+          </a:p>
+        </p:txBody>
+      </p:sp>
+      <p:pic>
+        <p:nvPicPr>
+          <p:cNvPr id="3" name="Picture 2">
+            <a:extLst>
+              <a:ext uri="{FF2B5EF4-FFF2-40B4-BE49-F238E27FC236}">
+                <a16:creationId xmlns:a16="http://schemas.microsoft.com/office/drawing/2014/main" id="{2B1ADB05-0A04-4EC9-A81C-E64D3556C0D4}"/>
+              </a:ext>
+            </a:extLst>
+          </p:cNvPr>
+          <p:cNvPicPr>
+            <a:picLocks noChangeAspect="1"/>
+          </p:cNvPicPr>
+          <p:nvPr/>
+        </p:nvPicPr>
+        <p:blipFill>
+          <a:blip r:embed="rId2"/>
+          <a:stretch>
+            <a:fillRect/>
+          </a:stretch>
+        </p:blipFill>
+        <p:spPr>
+          <a:xfrm>
+            <a:off x="451257" y="3399942"/>
+            <a:ext cx="8869013" cy="3458058"/>
+          </a:xfrm>
+          <a:prstGeom prst="rect">
+            <a:avLst/>
+          </a:prstGeom>
+        </p:spPr>
+      </p:pic>
+    </p:spTree>
+    <p:extLst>
+      <p:ext uri="{BB962C8B-B14F-4D97-AF65-F5344CB8AC3E}">
+        <p14:creationId xmlns:p14="http://schemas.microsoft.com/office/powerpoint/2010/main" val="3201437483"/>
+      </p:ext>
+    </p:extLst>
+  </p:cSld>
+  <p:clrMapOvr>
+    <a:masterClrMapping/>
+  </p:clrMapOvr>
+</p:sld>
+</file>
+
+<file path=ppt/slides/slide5.xml><?xml version="1.0" encoding="utf-8"?>
+<p:sld xmlns:a="http://schemas.openxmlformats.org/drawingml/2006/main" xmlns:r="http://schemas.openxmlformats.org/officeDocument/2006/relationships" xmlns:p="http://schemas.openxmlformats.org/presentationml/2006/main">
+  <p:cSld>
+    <p:spTree>
+      <p:nvGrpSpPr>
+        <p:cNvPr id="1" name=""/>
+        <p:cNvGrpSpPr/>
+        <p:nvPr/>
+      </p:nvGrpSpPr>
+      <p:grpSpPr>
+        <a:xfrm>
+          <a:off x="0" y="0"/>
+          <a:ext cx="0" cy="0"/>
+          <a:chOff x="0" y="0"/>
+          <a:chExt cx="0" cy="0"/>
+        </a:xfrm>
+      </p:grpSpPr>
+      <p:sp>
+        <p:nvSpPr>
+          <p:cNvPr id="2" name="Rectangle 1">
+            <a:extLst>
+              <a:ext uri="{FF2B5EF4-FFF2-40B4-BE49-F238E27FC236}">
+                <a16:creationId xmlns:a16="http://schemas.microsoft.com/office/drawing/2014/main" id="{9F812DDB-48F5-4C67-A113-AC81F9ACC4C8}"/>
+              </a:ext>
+            </a:extLst>
+          </p:cNvPr>
+          <p:cNvSpPr/>
+          <p:nvPr/>
+        </p:nvSpPr>
+        <p:spPr>
+          <a:xfrm>
+            <a:off x="251011" y="197242"/>
+            <a:ext cx="11940989" cy="2862322"/>
+          </a:xfrm>
+          <a:prstGeom prst="rect">
+            <a:avLst/>
+          </a:prstGeom>
+        </p:spPr>
+        <p:txBody>
+          <a:bodyPr wrap="square">
+            <a:spAutoFit/>
+          </a:bodyPr>
+          <a:lstStyle/>
+          <a:p>
+            <a:r>
+              <a:rPr lang="en-US" dirty="0"/>
+              <a:t>Question 2: Write an Interactive Log Script</a:t>
+            </a:r>
+          </a:p>
+          <a:p>
+            <a:br>
+              <a:rPr lang="en-US" dirty="0"/>
+            </a:br>
+            <a:endParaRPr lang="en-US" dirty="0"/>
+          </a:p>
+          <a:p>
+            <a:r>
+              <a:rPr lang="en-US" dirty="0"/>
+              <a:t>Objective: Using the </a:t>
+            </a:r>
+            <a:r>
+              <a:rPr lang="en-US" dirty="0" err="1"/>
+              <a:t>webapp</a:t>
+            </a:r>
+            <a:r>
+              <a:rPr lang="en-US" dirty="0"/>
+              <a:t>/ structure from Question 1, write a bash script that takes user input, reads a config file, and writes timestamped log entries. The log entries you create here will be the input for Question 3.</a:t>
+            </a:r>
+          </a:p>
+          <a:p>
+            <a:r>
+              <a:rPr lang="en-US" dirty="0"/>
+              <a:t>● Create a new script file at /home/ec2-user/webapp/scripts/log_user.sh using vim. Start with the correct shebang line.</a:t>
+            </a:r>
+          </a:p>
+          <a:p>
+            <a:r>
+              <a:rPr lang="en-US" dirty="0"/>
+              <a:t>● Use read -p to prompt the user to enter their name and store it in a variable called username.</a:t>
+            </a:r>
+          </a:p>
+          <a:p>
+            <a:r>
+              <a:rPr lang="en-US" dirty="0"/>
+              <a:t>● Use cat with the absolute path to display the contents of config/</a:t>
+            </a:r>
+            <a:r>
+              <a:rPr lang="en-US" dirty="0" err="1"/>
+              <a:t>app.conf</a:t>
+            </a:r>
+            <a:r>
+              <a:rPr lang="en-US" dirty="0"/>
+              <a:t> to the screen.</a:t>
+            </a:r>
+          </a:p>
+          <a:p>
+            <a:r>
+              <a:rPr lang="en-US" dirty="0"/>
+              <a:t>● Append a log entry to logs/app.log using echo &gt;&gt; in this exact format: Login: $username Date: $(date). Then display the full log file contents.</a:t>
+            </a:r>
+          </a:p>
+        </p:txBody>
+      </p:sp>
+      <p:pic>
+        <p:nvPicPr>
+          <p:cNvPr id="6" name="Picture 5">
+            <a:extLst>
+              <a:ext uri="{FF2B5EF4-FFF2-40B4-BE49-F238E27FC236}">
+                <a16:creationId xmlns:a16="http://schemas.microsoft.com/office/drawing/2014/main" id="{F064BC14-37B0-4F68-8935-DC011CB831D2}"/>
+              </a:ext>
+            </a:extLst>
+          </p:cNvPr>
+          <p:cNvPicPr>
+            <a:picLocks noChangeAspect="1"/>
+          </p:cNvPicPr>
+          <p:nvPr/>
+        </p:nvPicPr>
+        <p:blipFill>
+          <a:blip r:embed="rId2"/>
+          <a:stretch>
+            <a:fillRect/>
+          </a:stretch>
+        </p:blipFill>
+        <p:spPr>
+          <a:xfrm>
+            <a:off x="251011" y="3190195"/>
+            <a:ext cx="9987061" cy="2659276"/>
+          </a:xfrm>
+          <a:prstGeom prst="rect">
+            <a:avLst/>
+          </a:prstGeom>
+        </p:spPr>
+      </p:pic>
+    </p:spTree>
+    <p:extLst>
+      <p:ext uri="{BB962C8B-B14F-4D97-AF65-F5344CB8AC3E}">
+        <p14:creationId xmlns:p14="http://schemas.microsoft.com/office/powerpoint/2010/main" val="2527801191"/>
+      </p:ext>
+    </p:extLst>
+  </p:cSld>
+  <p:clrMapOvr>
+    <a:masterClrMapping/>
+  </p:clrMapOvr>
+</p:sld>
+</file>
+
+<file path=ppt/slides/slide6.xml><?xml version="1.0" encoding="utf-8"?>
+<p:sld xmlns:a="http://schemas.openxmlformats.org/drawingml/2006/main" xmlns:r="http://schemas.openxmlformats.org/officeDocument/2006/relationships" xmlns:p="http://schemas.openxmlformats.org/presentationml/2006/main">
+  <p:cSld>
+    <p:spTree>
+      <p:nvGrpSpPr>
+        <p:cNvPr id="1" name=""/>
+        <p:cNvGrpSpPr/>
+        <p:nvPr/>
+      </p:nvGrpSpPr>
+      <p:grpSpPr>
+        <a:xfrm>
+          <a:off x="0" y="0"/>
+          <a:ext cx="0" cy="0"/>
+          <a:chOff x="0" y="0"/>
+          <a:chExt cx="0" cy="0"/>
+        </a:xfrm>
+      </p:grpSpPr>
+      <p:sp>
+        <p:nvSpPr>
+          <p:cNvPr id="4" name="Rectangle 3">
+            <a:extLst>
+              <a:ext uri="{FF2B5EF4-FFF2-40B4-BE49-F238E27FC236}">
+                <a16:creationId xmlns:a16="http://schemas.microsoft.com/office/drawing/2014/main" id="{C9B89541-5871-42D1-ACE2-79A814F9F98F}"/>
+              </a:ext>
+            </a:extLst>
+          </p:cNvPr>
+          <p:cNvSpPr/>
+          <p:nvPr/>
+        </p:nvSpPr>
+        <p:spPr>
+          <a:xfrm>
+            <a:off x="412376" y="263168"/>
+            <a:ext cx="6096000" cy="2862322"/>
+          </a:xfrm>
+          <a:prstGeom prst="rect">
+            <a:avLst/>
+          </a:prstGeom>
+        </p:spPr>
+        <p:txBody>
+          <a:bodyPr>
+            <a:spAutoFit/>
+          </a:bodyPr>
+          <a:lstStyle/>
+          <a:p>
+            <a:r>
+              <a:rPr lang="en-US" dirty="0"/>
+              <a:t>● Give the script execute permission with </a:t>
+            </a:r>
+            <a:r>
+              <a:rPr lang="en-US" dirty="0" err="1"/>
+              <a:t>chmod</a:t>
+            </a:r>
+            <a:r>
+              <a:rPr lang="en-US" dirty="0"/>
+              <a:t> +x and run it at least 3 times using different names (e.g., Chirag, Priya, Ravi) so the log file has multiple entries for Question 3.</a:t>
+            </a:r>
+          </a:p>
+          <a:p>
+            <a:r>
+              <a:rPr lang="en-US" dirty="0"/>
+              <a:t>Sample script structure:</a:t>
+            </a:r>
+          </a:p>
+          <a:p>
+            <a:r>
+              <a:rPr lang="en-US" dirty="0"/>
+              <a:t>#!/bin/bash</a:t>
+            </a:r>
+          </a:p>
+          <a:p>
+            <a:r>
+              <a:rPr lang="en-US" dirty="0"/>
+              <a:t>read -p "Enter your name: " username</a:t>
+            </a:r>
+          </a:p>
+          <a:p>
+            <a:r>
+              <a:rPr lang="en-US" dirty="0"/>
+              <a:t>cat /home/ec2-user/</a:t>
+            </a:r>
+            <a:r>
+              <a:rPr lang="en-US" dirty="0" err="1"/>
+              <a:t>webapp</a:t>
+            </a:r>
+            <a:r>
+              <a:rPr lang="en-US" dirty="0"/>
+              <a:t>/config/</a:t>
+            </a:r>
+            <a:r>
+              <a:rPr lang="en-US" dirty="0" err="1"/>
+              <a:t>app.conf</a:t>
+            </a:r>
+            <a:endParaRPr lang="en-US" dirty="0"/>
+          </a:p>
+          <a:p>
+            <a:r>
+              <a:rPr lang="en-US" dirty="0"/>
+              <a:t>echo "Login: $username Date: $(date)" &gt;&gt; /home/ec2-user/</a:t>
+            </a:r>
+            <a:r>
+              <a:rPr lang="en-US" dirty="0" err="1"/>
+              <a:t>webapp</a:t>
+            </a:r>
+            <a:r>
+              <a:rPr lang="en-US" dirty="0"/>
+              <a:t>/logs/app.log</a:t>
+            </a:r>
+          </a:p>
+          <a:p>
+            <a:r>
+              <a:rPr lang="en-US" dirty="0"/>
+              <a:t>cat /home/ec2-user/</a:t>
+            </a:r>
+            <a:r>
+              <a:rPr lang="en-US" dirty="0" err="1"/>
+              <a:t>webapp</a:t>
+            </a:r>
+            <a:r>
+              <a:rPr lang="en-US" dirty="0"/>
+              <a:t>/logs/app.log</a:t>
+            </a:r>
+          </a:p>
+        </p:txBody>
+      </p:sp>
+      <p:pic>
+        <p:nvPicPr>
+          <p:cNvPr id="7" name="Picture 6">
+            <a:extLst>
+              <a:ext uri="{FF2B5EF4-FFF2-40B4-BE49-F238E27FC236}">
+                <a16:creationId xmlns:a16="http://schemas.microsoft.com/office/drawing/2014/main" id="{C403936D-9EA5-4F6B-86A6-A69E75FAE3B2}"/>
+              </a:ext>
+            </a:extLst>
+          </p:cNvPr>
+          <p:cNvPicPr>
+            <a:picLocks noChangeAspect="1"/>
+          </p:cNvPicPr>
+          <p:nvPr/>
+        </p:nvPicPr>
+        <p:blipFill>
+          <a:blip r:embed="rId2"/>
+          <a:stretch>
+            <a:fillRect/>
+          </a:stretch>
+        </p:blipFill>
+        <p:spPr>
+          <a:xfrm>
+            <a:off x="412376" y="3179277"/>
+            <a:ext cx="7507942" cy="3437371"/>
+          </a:xfrm>
+          <a:prstGeom prst="rect">
+            <a:avLst/>
+          </a:prstGeom>
+        </p:spPr>
+      </p:pic>
+      <p:pic>
+        <p:nvPicPr>
+          <p:cNvPr id="8" name="Picture 7">
+            <a:extLst>
+              <a:ext uri="{FF2B5EF4-FFF2-40B4-BE49-F238E27FC236}">
+                <a16:creationId xmlns:a16="http://schemas.microsoft.com/office/drawing/2014/main" id="{A67D516E-7C4F-4D28-80EC-A0D8135B1871}"/>
+              </a:ext>
+            </a:extLst>
+          </p:cNvPr>
+          <p:cNvPicPr>
+            <a:picLocks noChangeAspect="1"/>
+          </p:cNvPicPr>
+          <p:nvPr/>
+        </p:nvPicPr>
+        <p:blipFill>
+          <a:blip r:embed="rId3"/>
+          <a:stretch>
+            <a:fillRect/>
+          </a:stretch>
+        </p:blipFill>
+        <p:spPr>
+          <a:xfrm>
+            <a:off x="5683625" y="866045"/>
+            <a:ext cx="6508375" cy="2251546"/>
+          </a:xfrm>
+          <a:prstGeom prst="rect">
+            <a:avLst/>
+          </a:prstGeom>
+        </p:spPr>
+      </p:pic>
+    </p:spTree>
+    <p:extLst>
+      <p:ext uri="{BB962C8B-B14F-4D97-AF65-F5344CB8AC3E}">
+        <p14:creationId xmlns:p14="http://schemas.microsoft.com/office/powerpoint/2010/main" val="3800805216"/>
+      </p:ext>
+    </p:extLst>
+  </p:cSld>
+  <p:clrMapOvr>
+    <a:masterClrMapping/>
+  </p:clrMapOvr>
+</p:sld>
+</file>
+
+<file path=ppt/slides/slide7.xml><?xml version="1.0" encoding="utf-8"?>
+<p:sld xmlns:a="http://schemas.openxmlformats.org/drawingml/2006/main" xmlns:r="http://schemas.openxmlformats.org/officeDocument/2006/relationships" xmlns:p="http://schemas.openxmlformats.org/presentationml/2006/main">
+  <p:cSld>
+    <p:spTree>
+      <p:nvGrpSpPr>
+        <p:cNvPr id="1" name=""/>
+        <p:cNvGrpSpPr/>
+        <p:nvPr/>
+      </p:nvGrpSpPr>
+      <p:grpSpPr>
+        <a:xfrm>
+          <a:off x="0" y="0"/>
+          <a:ext cx="0" cy="0"/>
+          <a:chOff x="0" y="0"/>
+          <a:chExt cx="0" cy="0"/>
+        </a:xfrm>
+      </p:grpSpPr>
+      <p:sp>
+        <p:nvSpPr>
+          <p:cNvPr id="2" name="Rectangle 1">
+            <a:extLst>
+              <a:ext uri="{FF2B5EF4-FFF2-40B4-BE49-F238E27FC236}">
+                <a16:creationId xmlns:a16="http://schemas.microsoft.com/office/drawing/2014/main" id="{B33BDE85-7787-4A00-9465-BC64D06A2B71}"/>
+              </a:ext>
+            </a:extLst>
+          </p:cNvPr>
+          <p:cNvSpPr/>
+          <p:nvPr/>
+        </p:nvSpPr>
+        <p:spPr>
+          <a:xfrm>
+            <a:off x="0" y="355022"/>
+            <a:ext cx="11766176" cy="1384995"/>
+          </a:xfrm>
+          <a:prstGeom prst="rect">
+            <a:avLst/>
+          </a:prstGeom>
+        </p:spPr>
+        <p:txBody>
+          <a:bodyPr wrap="square">
+            <a:spAutoFit/>
+          </a:bodyPr>
+          <a:lstStyle/>
+          <a:p>
+            <a:r>
+              <a:rPr lang="en-US" sz="1400" dirty="0">
+                <a:latin typeface="Medium Sans"/>
+              </a:rPr>
+              <a:t>Question 3: User Management and File Permission Control</a:t>
+            </a:r>
+          </a:p>
+          <a:p>
+            <a:r>
+              <a:rPr lang="en-US" sz="1400" dirty="0">
+                <a:latin typeface="Medium Sans"/>
+              </a:rPr>
+              <a:t>Objective: Create 4 Linux users. Two of them must have write access to the log_user.sh script created in Question 2, and the other two must have read-only access. Use Linux groups and </a:t>
+            </a:r>
+            <a:r>
+              <a:rPr lang="en-US" sz="1400" dirty="0" err="1">
+                <a:latin typeface="Medium Sans"/>
+              </a:rPr>
+              <a:t>chmod</a:t>
+            </a:r>
+            <a:r>
+              <a:rPr lang="en-US" sz="1400" dirty="0">
+                <a:latin typeface="Medium Sans"/>
+              </a:rPr>
+              <a:t> to control this.</a:t>
+            </a:r>
+          </a:p>
+          <a:p>
+            <a:r>
+              <a:rPr lang="en-US" sz="1400" dirty="0">
+                <a:latin typeface="Medium Sans"/>
+              </a:rPr>
+              <a:t>● Create a group called writers</a:t>
+            </a:r>
+          </a:p>
+          <a:p>
+            <a:r>
+              <a:rPr lang="en-US" sz="1400" dirty="0">
+                <a:latin typeface="Medium Sans"/>
+              </a:rPr>
+              <a:t>● Create 4 users with home directories:</a:t>
+            </a:r>
+          </a:p>
+          <a:p>
+            <a:r>
+              <a:rPr lang="en-US" sz="1400" dirty="0">
+                <a:latin typeface="Medium Sans"/>
+              </a:rPr>
+              <a:t>● Add the two write-access users to the writers group:</a:t>
+            </a:r>
+          </a:p>
+        </p:txBody>
+      </p:sp>
+      <p:pic>
+        <p:nvPicPr>
+          <p:cNvPr id="3" name="Picture 2">
+            <a:extLst>
+              <a:ext uri="{FF2B5EF4-FFF2-40B4-BE49-F238E27FC236}">
+                <a16:creationId xmlns:a16="http://schemas.microsoft.com/office/drawing/2014/main" id="{4782FC86-8281-48BF-9FA6-2CD2EA22AAD2}"/>
+              </a:ext>
+            </a:extLst>
+          </p:cNvPr>
+          <p:cNvPicPr>
+            <a:picLocks noChangeAspect="1"/>
+          </p:cNvPicPr>
+          <p:nvPr/>
+        </p:nvPicPr>
+        <p:blipFill>
+          <a:blip r:embed="rId2"/>
+          <a:stretch>
+            <a:fillRect/>
+          </a:stretch>
+        </p:blipFill>
+        <p:spPr>
+          <a:xfrm>
+            <a:off x="90094" y="1740017"/>
+            <a:ext cx="5630061" cy="1124107"/>
+          </a:xfrm>
+          <a:prstGeom prst="rect">
+            <a:avLst/>
+          </a:prstGeom>
+        </p:spPr>
+      </p:pic>
+      <p:sp>
+        <p:nvSpPr>
+          <p:cNvPr id="4" name="Rectangle 3">
+            <a:extLst>
+              <a:ext uri="{FF2B5EF4-FFF2-40B4-BE49-F238E27FC236}">
+                <a16:creationId xmlns:a16="http://schemas.microsoft.com/office/drawing/2014/main" id="{5A04163F-B5A0-43E4-8C82-03332F50B93B}"/>
+              </a:ext>
+            </a:extLst>
+          </p:cNvPr>
+          <p:cNvSpPr/>
+          <p:nvPr/>
+        </p:nvSpPr>
+        <p:spPr>
+          <a:xfrm>
+            <a:off x="90094" y="2701938"/>
+            <a:ext cx="10477499" cy="954107"/>
+          </a:xfrm>
+          <a:prstGeom prst="rect">
+            <a:avLst/>
+          </a:prstGeom>
+        </p:spPr>
+        <p:txBody>
+          <a:bodyPr wrap="square">
+            <a:spAutoFit/>
+          </a:bodyPr>
+          <a:lstStyle/>
+          <a:p>
+            <a:endParaRPr lang="en-US" sz="1400" dirty="0">
+              <a:latin typeface="Medium Sans"/>
+            </a:endParaRPr>
+          </a:p>
+          <a:p>
+            <a:r>
+              <a:rPr lang="en-US" sz="1400" dirty="0">
+                <a:latin typeface="Medium Sans"/>
+              </a:rPr>
+              <a:t>● Change the group ownership of log_user.sh to writers: </a:t>
+            </a:r>
+            <a:r>
+              <a:rPr lang="en-US" sz="1400" dirty="0" err="1">
+                <a:latin typeface="Medium Sans"/>
+              </a:rPr>
+              <a:t>sudo</a:t>
+            </a:r>
+            <a:r>
+              <a:rPr lang="en-US" sz="1400" dirty="0">
+                <a:latin typeface="Medium Sans"/>
+              </a:rPr>
+              <a:t> </a:t>
+            </a:r>
+            <a:r>
+              <a:rPr lang="en-US" sz="1400" dirty="0" err="1">
+                <a:latin typeface="Medium Sans"/>
+              </a:rPr>
+              <a:t>chown</a:t>
+            </a:r>
+            <a:r>
+              <a:rPr lang="en-US" sz="1400" dirty="0">
+                <a:latin typeface="Medium Sans"/>
+              </a:rPr>
+              <a:t> </a:t>
+            </a:r>
+            <a:r>
+              <a:rPr lang="en-US" sz="1400" dirty="0" err="1">
+                <a:latin typeface="Medium Sans"/>
+              </a:rPr>
+              <a:t>root:writers</a:t>
+            </a:r>
+            <a:r>
+              <a:rPr lang="en-US" sz="1400" dirty="0">
+                <a:latin typeface="Medium Sans"/>
+              </a:rPr>
+              <a:t> /home/ec2-user/webapp/scripts/log_user.sh</a:t>
+            </a:r>
+          </a:p>
+          <a:p>
+            <a:r>
+              <a:rPr lang="en-US" sz="1400" dirty="0">
+                <a:latin typeface="Medium Sans"/>
+              </a:rPr>
+              <a:t>● Set permissions to 664 so writers group gets </a:t>
+            </a:r>
+            <a:r>
+              <a:rPr lang="en-US" sz="1400" dirty="0" err="1">
+                <a:latin typeface="Medium Sans"/>
+              </a:rPr>
+              <a:t>rw</a:t>
+            </a:r>
+            <a:r>
+              <a:rPr lang="en-US" sz="1400" dirty="0">
+                <a:latin typeface="Medium Sans"/>
+              </a:rPr>
+              <a:t> and others get r only: </a:t>
+            </a:r>
+            <a:r>
+              <a:rPr lang="en-US" sz="1400" dirty="0" err="1">
+                <a:latin typeface="Medium Sans"/>
+              </a:rPr>
+              <a:t>sudo</a:t>
+            </a:r>
+            <a:r>
+              <a:rPr lang="en-US" sz="1400" dirty="0">
+                <a:latin typeface="Medium Sans"/>
+              </a:rPr>
+              <a:t> </a:t>
+            </a:r>
+            <a:r>
+              <a:rPr lang="en-US" sz="1400" dirty="0" err="1">
+                <a:latin typeface="Medium Sans"/>
+              </a:rPr>
+              <a:t>chmod</a:t>
+            </a:r>
+            <a:r>
+              <a:rPr lang="en-US" sz="1400" dirty="0">
+                <a:latin typeface="Medium Sans"/>
+              </a:rPr>
+              <a:t> 664 /home/ec2-user/webapp/scripts/log_user.sh</a:t>
+            </a:r>
+          </a:p>
+          <a:p>
+            <a:r>
+              <a:rPr lang="en-US" sz="1400" dirty="0">
+                <a:latin typeface="Medium Sans"/>
+              </a:rPr>
+              <a:t>● Verify the permission output shows: -</a:t>
+            </a:r>
+            <a:r>
+              <a:rPr lang="en-US" sz="1400" dirty="0" err="1">
+                <a:latin typeface="Medium Sans"/>
+              </a:rPr>
+              <a:t>rw</a:t>
+            </a:r>
+            <a:r>
+              <a:rPr lang="en-US" sz="1400" dirty="0">
+                <a:latin typeface="Medium Sans"/>
+              </a:rPr>
+              <a:t>-</a:t>
+            </a:r>
+            <a:r>
+              <a:rPr lang="en-US" sz="1400" dirty="0" err="1">
+                <a:latin typeface="Medium Sans"/>
+              </a:rPr>
+              <a:t>rw</a:t>
+            </a:r>
+            <a:r>
+              <a:rPr lang="en-US" sz="1400" dirty="0">
+                <a:latin typeface="Medium Sans"/>
+              </a:rPr>
+              <a:t>-r--  root  writers  log_user.sh</a:t>
+            </a:r>
+          </a:p>
+        </p:txBody>
+      </p:sp>
+      <p:pic>
+        <p:nvPicPr>
+          <p:cNvPr id="5" name="Picture 4">
+            <a:extLst>
+              <a:ext uri="{FF2B5EF4-FFF2-40B4-BE49-F238E27FC236}">
+                <a16:creationId xmlns:a16="http://schemas.microsoft.com/office/drawing/2014/main" id="{A0D7A1E3-F0FC-4564-BBAF-67C9C94319CA}"/>
+              </a:ext>
+            </a:extLst>
+          </p:cNvPr>
+          <p:cNvPicPr>
+            <a:picLocks noChangeAspect="1"/>
+          </p:cNvPicPr>
+          <p:nvPr/>
+        </p:nvPicPr>
+        <p:blipFill>
+          <a:blip r:embed="rId3"/>
+          <a:stretch>
+            <a:fillRect/>
+          </a:stretch>
+        </p:blipFill>
+        <p:spPr>
+          <a:xfrm>
+            <a:off x="250909" y="3826045"/>
+            <a:ext cx="8526065" cy="1066949"/>
+          </a:xfrm>
+          <a:prstGeom prst="rect">
+            <a:avLst/>
+          </a:prstGeom>
+        </p:spPr>
+      </p:pic>
+    </p:spTree>
+    <p:extLst>
+      <p:ext uri="{BB962C8B-B14F-4D97-AF65-F5344CB8AC3E}">
+        <p14:creationId xmlns:p14="http://schemas.microsoft.com/office/powerpoint/2010/main" val="2073605038"/>
+      </p:ext>
+    </p:extLst>
+  </p:cSld>
+  <p:clrMapOvr>
+    <a:masterClrMapping/>
+  </p:clrMapOvr>
+</p:sld>
+</file>
+
+<file path=ppt/slides/slide8.xml><?xml version="1.0" encoding="utf-8"?>
+<p:sld xmlns:a="http://schemas.openxmlformats.org/drawingml/2006/main" xmlns:r="http://schemas.openxmlformats.org/officeDocument/2006/relationships" xmlns:p="http://schemas.openxmlformats.org/presentationml/2006/main">
+  <p:cSld>
+    <p:spTree>
+      <p:nvGrpSpPr>
+        <p:cNvPr id="1" name=""/>
+        <p:cNvGrpSpPr/>
+        <p:nvPr/>
+      </p:nvGrpSpPr>
+      <p:grpSpPr>
+        <a:xfrm>
+          <a:off x="0" y="0"/>
+          <a:ext cx="0" cy="0"/>
+          <a:chOff x="0" y="0"/>
+          <a:chExt cx="0" cy="0"/>
+        </a:xfrm>
+      </p:grpSpPr>
+      <p:sp>
+        <p:nvSpPr>
+          <p:cNvPr id="3" name="Rectangle 2">
+            <a:extLst>
+              <a:ext uri="{FF2B5EF4-FFF2-40B4-BE49-F238E27FC236}">
+                <a16:creationId xmlns:a16="http://schemas.microsoft.com/office/drawing/2014/main" id="{6921BFD3-5330-4A56-8219-AD1349B89065}"/>
+              </a:ext>
+            </a:extLst>
+          </p:cNvPr>
+          <p:cNvSpPr/>
+          <p:nvPr/>
+        </p:nvSpPr>
+        <p:spPr>
+          <a:xfrm>
+            <a:off x="101600" y="163624"/>
+            <a:ext cx="6096000" cy="2031325"/>
+          </a:xfrm>
+          <a:prstGeom prst="rect">
+            <a:avLst/>
+          </a:prstGeom>
+        </p:spPr>
+        <p:txBody>
+          <a:bodyPr>
+            <a:spAutoFit/>
+          </a:bodyPr>
+          <a:lstStyle/>
+          <a:p>
+            <a:r>
+              <a:rPr lang="en-US" dirty="0">
+                <a:latin typeface="Medium Sans"/>
+              </a:rPr>
+              <a:t>● Switch to each user and test access to confirm it is working correctly:</a:t>
+            </a:r>
+          </a:p>
+          <a:p>
+            <a:r>
+              <a:rPr lang="en-US" dirty="0">
+                <a:latin typeface="Medium Sans"/>
+              </a:rPr>
+              <a:t>Permission Layout (</a:t>
+            </a:r>
+            <a:r>
+              <a:rPr lang="en-US" dirty="0" err="1">
+                <a:latin typeface="Medium Sans"/>
+              </a:rPr>
+              <a:t>chmod</a:t>
+            </a:r>
+            <a:r>
+              <a:rPr lang="en-US" dirty="0">
+                <a:latin typeface="Medium Sans"/>
+              </a:rPr>
+              <a:t> 664):</a:t>
+            </a:r>
+          </a:p>
+          <a:p>
+            <a:r>
+              <a:rPr lang="en-US" dirty="0" err="1">
+                <a:latin typeface="Medium Sans"/>
+              </a:rPr>
+              <a:t>chmod</a:t>
+            </a:r>
+            <a:r>
+              <a:rPr lang="en-US" dirty="0">
+                <a:latin typeface="Medium Sans"/>
+              </a:rPr>
+              <a:t> 664 log_user.sh</a:t>
+            </a:r>
+          </a:p>
+          <a:p>
+            <a:r>
+              <a:rPr lang="en-US" dirty="0">
+                <a:latin typeface="Medium Sans"/>
+              </a:rPr>
+              <a:t>       6          6          4</a:t>
+            </a:r>
+          </a:p>
+          <a:p>
+            <a:r>
+              <a:rPr lang="en-US" dirty="0">
+                <a:latin typeface="Medium Sans"/>
+              </a:rPr>
+              <a:t>  Owner(</a:t>
+            </a:r>
+            <a:r>
+              <a:rPr lang="en-US" dirty="0" err="1">
+                <a:latin typeface="Medium Sans"/>
+              </a:rPr>
+              <a:t>rw</a:t>
+            </a:r>
+            <a:r>
+              <a:rPr lang="en-US" dirty="0">
+                <a:latin typeface="Medium Sans"/>
+              </a:rPr>
+              <a:t>)  Group(</a:t>
+            </a:r>
+            <a:r>
+              <a:rPr lang="en-US" dirty="0" err="1">
+                <a:latin typeface="Medium Sans"/>
+              </a:rPr>
+              <a:t>rw</a:t>
+            </a:r>
+            <a:r>
+              <a:rPr lang="en-US" dirty="0">
+                <a:latin typeface="Medium Sans"/>
+              </a:rPr>
+              <a:t>)  Others(r)</a:t>
+            </a:r>
+          </a:p>
+          <a:p>
+            <a:r>
+              <a:rPr lang="en-US" dirty="0">
+                <a:latin typeface="Medium Sans"/>
+              </a:rPr>
+              <a:t>   root      writers    devuser3, devuser4</a:t>
+            </a:r>
+          </a:p>
+        </p:txBody>
+      </p:sp>
+      <p:pic>
+        <p:nvPicPr>
+          <p:cNvPr id="4" name="Picture 3">
+            <a:extLst>
+              <a:ext uri="{FF2B5EF4-FFF2-40B4-BE49-F238E27FC236}">
+                <a16:creationId xmlns:a16="http://schemas.microsoft.com/office/drawing/2014/main" id="{7282D5F3-5CC2-4FEB-A619-CA7D6B00C8C7}"/>
+              </a:ext>
+            </a:extLst>
+          </p:cNvPr>
+          <p:cNvPicPr>
+            <a:picLocks noChangeAspect="1"/>
+          </p:cNvPicPr>
+          <p:nvPr/>
+        </p:nvPicPr>
+        <p:blipFill>
+          <a:blip r:embed="rId2"/>
+          <a:stretch>
+            <a:fillRect/>
+          </a:stretch>
+        </p:blipFill>
+        <p:spPr>
+          <a:xfrm>
+            <a:off x="101600" y="2670462"/>
+            <a:ext cx="9620624" cy="3025053"/>
+          </a:xfrm>
+          <a:prstGeom prst="rect">
+            <a:avLst/>
+          </a:prstGeom>
+        </p:spPr>
+      </p:pic>
+      <p:pic>
+        <p:nvPicPr>
+          <p:cNvPr id="5" name="Picture 4">
+            <a:extLst>
+              <a:ext uri="{FF2B5EF4-FFF2-40B4-BE49-F238E27FC236}">
+                <a16:creationId xmlns:a16="http://schemas.microsoft.com/office/drawing/2014/main" id="{946C9401-2B28-4A78-A7E8-165BE1F2385B}"/>
+              </a:ext>
+            </a:extLst>
+          </p:cNvPr>
+          <p:cNvPicPr>
+            <a:picLocks noChangeAspect="1"/>
+          </p:cNvPicPr>
+          <p:nvPr/>
+        </p:nvPicPr>
+        <p:blipFill>
+          <a:blip r:embed="rId3"/>
+          <a:stretch>
+            <a:fillRect/>
+          </a:stretch>
+        </p:blipFill>
+        <p:spPr>
+          <a:xfrm>
+            <a:off x="101600" y="2151664"/>
+            <a:ext cx="11437407" cy="466790"/>
+          </a:xfrm>
+          <a:prstGeom prst="rect">
+            <a:avLst/>
+          </a:prstGeom>
+        </p:spPr>
+      </p:pic>
+      <p:pic>
+        <p:nvPicPr>
+          <p:cNvPr id="6" name="Picture 5">
+            <a:extLst>
+              <a:ext uri="{FF2B5EF4-FFF2-40B4-BE49-F238E27FC236}">
+                <a16:creationId xmlns:a16="http://schemas.microsoft.com/office/drawing/2014/main" id="{D9927A2C-A99F-4065-B87F-7F7AEDA986A4}"/>
+              </a:ext>
+            </a:extLst>
+          </p:cNvPr>
+          <p:cNvPicPr>
+            <a:picLocks noChangeAspect="1"/>
+          </p:cNvPicPr>
+          <p:nvPr/>
+        </p:nvPicPr>
+        <p:blipFill>
+          <a:blip r:embed="rId4"/>
+          <a:stretch>
+            <a:fillRect/>
+          </a:stretch>
+        </p:blipFill>
+        <p:spPr>
+          <a:xfrm>
+            <a:off x="101600" y="5747523"/>
+            <a:ext cx="8564170" cy="1077153"/>
+          </a:xfrm>
+          <a:prstGeom prst="rect">
+            <a:avLst/>
+          </a:prstGeom>
+        </p:spPr>
+      </p:pic>
+    </p:spTree>
+    <p:extLst>
+      <p:ext uri="{BB962C8B-B14F-4D97-AF65-F5344CB8AC3E}">
+        <p14:creationId xmlns:p14="http://schemas.microsoft.com/office/powerpoint/2010/main" val="3587763102"/>
+      </p:ext>
+    </p:extLst>
+  </p:cSld>
+  <p:clrMapOvr>
+    <a:masterClrMapping/>
+  </p:clrMapOvr>
+</p:sld>
+</file>
+
 <file path=ppt/theme/theme1.xml><?xml version="1.0" encoding="utf-8"?>
 <a:theme xmlns:a="http://schemas.openxmlformats.org/drawingml/2006/main" name="Office Theme">
   <a:themeElements>
